--- a/decks/combined-waves/combined-waves_ch5_measuring-waves.pptx
+++ b/decks/combined-waves/combined-waves_ch5_measuring-waves.pptx
@@ -124,30 +124,30 @@
   <p:extLst>
     <p:ext uri="{521415D9-36F7-43E2-AB2F-B90AF26B5E84}">
       <p14:sectionLst xmlns:p14="http://schemas.microsoft.com/office/powerpoint/2010/main">
-        <p14:section name="Opening" id="{c2c1ca1b-f913-d8cd-aa88-c34a03461100}">
+        <p14:section name="Opening" id="{5b3877c2-96e8-e827-8d34-2adc97faac5a}">
           <p14:sldIdLst>
             <p14:sldId id="256"/>
           </p14:sldIdLst>
         </p14:section>
-        <p14:section name="Gate" id="{4d440b4a-ab54-dcef-afd6-e9906bcf224e}">
+        <p14:section name="Gate" id="{eb585302-86c8-747b-cfa9-02e92eff235f}">
           <p14:sldIdLst>
             <p14:sldId id="257"/>
             <p14:sldId id="258"/>
             <p14:sldId id="259"/>
           </p14:sldIdLst>
         </p14:section>
-        <p14:section name="Pre-teach" id="{869b80cf-a755-9f9c-71f5-28b3673eedf6}">
+        <p14:section name="Pre-teach" id="{be4d2da1-672e-a423-5f5c-b8da80c60f54}">
           <p14:sldIdLst>
             <p14:sldId id="260"/>
           </p14:sldIdLst>
         </p14:section>
-        <p14:section name="Read-along" id="{c1ce43e9-de62-321b-e0b3-1d85a5d43608}">
+        <p14:section name="Read-along" id="{58ea3c47-d021-7c09-e526-33e1483f63f5}">
           <p14:sldIdLst>
             <p14:sldId id="261"/>
             <p14:sldId id="262"/>
           </p14:sldIdLst>
         </p14:section>
-        <p14:section name="Teach" id="{e7d5c654-7ae4-5772-0ea1-405c88544af2}">
+        <p14:section name="Teach" id="{81fce38f-a1ad-30ca-fa0f-4255a262f0b7}">
           <p14:sldIdLst>
             <p14:sldId id="263"/>
             <p14:sldId id="264"/>
@@ -156,18 +156,18 @@
             <p14:sldId id="267"/>
           </p14:sldIdLst>
         </p14:section>
-        <p14:section name="Routes" id="{244bda7f-4c20-4966-c393-6754706da1f9}">
+        <p14:section name="Routes" id="{9a157aed-6aac-3b7e-877d-6accc51f47fd}">
           <p14:sldIdLst>
             <p14:sldId id="268"/>
             <p14:sldId id="269"/>
           </p14:sldIdLst>
         </p14:section>
-        <p14:section name="Close" id="{6bf58026-554d-5b93-ab9f-7f823bd8e64f}">
+        <p14:section name="Close" id="{8b56a6b7-0d87-8390-a195-fd3b4580db77}">
           <p14:sldIdLst>
             <p14:sldId id="270"/>
           </p14:sldIdLst>
         </p14:section>
-        <p14:section name="Answers" id="{fa6a2fdc-4b2e-9416-00e9-4d198e992650}">
+        <p14:section name="Answers" id="{4b8aabb7-cd40-93e7-dde9-fb1661350959}">
           <p14:sldIdLst>
             <p14:sldId id="271"/>
             <p14:sldId id="272"/>
@@ -1138,7 +1138,7 @@
               <a:rPr lang="en-US" dirty="0"/>
               <a:t>Exit ticket — individual, silent, on a slip or mini-whiteboard. Recall before help: no notes, no lanes, no hints. Collect before pupils leave.
 Question: Why can sound not travel through a vacuum?
-Answer: D   There are no particles to pass the vibration on.. Sound is a mechanical wave: it is carried by particles passing the vibration on. A vacuum has no particles.
+Answer: A   There are no particles to pass the vibration on.. Sound is a mechanical wave: it is carried by particles passing the vibration on. A vacuum has no particles.
 Source of this question: gate item 1 re-asked (options rotated) — this chapter has no third quick-check module.
 The ebook also holds task 3, "Plan the ripple tank practical", for homework or the next lesson's do now.
 Sort the slips: correct → ready to move on; incorrect → start next lesson in the pre-teach group, with the read-along and the Support lane. Same destination next time.</a:t>
@@ -1412,7 +1412,7 @@
             <a:r>
               <a:rPr lang="en-US" dirty="0"/>
               <a:t>Answers — exit ticket: Exit ticket. Reveal the answer; pupils mark their own work in a different colour, then read the "why" together. Same destination for every lane, so one answer serves the whole class.
-Answer: D   There are no particles to pass the vibration on.
+Answer: A   There are no particles to pass the vibration on.
 Why: Sound is a mechanical wave: it is carried by particles passing the vibration on. A vacuum has no particles.
 Ask a Support pupil to explain one step, and a Stretch pupil to share their extension.</a:t>
             </a:r>
@@ -1503,7 +1503,7 @@
             <a:r>
               <a:rPr lang="en-US" dirty="0"/>
               <a:t>Do now — retrieval. Silent, no notes, no help: recall comes before any support. Give about four minutes.
-1. Why can sound not travel through a vacuum?  →  A   There are no particles to pass the vibration on.
+1. Why can sound not travel through a vacuum?  →  B   There are no particles to pass the vibration on.
 2. In the ripple tank practical, which is the best way to measure the wavelength?  →  A   Measure the distance across several waves on the screen and divide by the number of waves.
 3. A vibrating string forms 3 loops across a length of 0.9 m. Calculate the wavelength in metres.  →  0.6 m
 Circulate: who gets 3/3 (Stretch route), 2/3 (Core), 0–1 (Support)? Use this to route pupils later in the lesson.</a:t>
@@ -1595,7 +1595,7 @@
             <a:r>
               <a:rPr lang="en-US" dirty="0"/>
               <a:t>Do now — retrieval. Silent, no notes, no help: recall comes before any support. Give about four minutes.
-1. Why can sound not travel through a vacuum?  →  A   There are no particles to pass the vibration on.
+1. Why can sound not travel through a vacuum?  →  B   There are no particles to pass the vibration on.
 2. In the ripple tank practical, which is the best way to measure the wavelength?  →  A   Measure the distance across several waves on the screen and divide by the number of waves.
 3. A vibrating string forms 3 loops across a length of 0.9 m. Calculate the wavelength in metres.  →  0.6 m
 Circulate: who gets 3/3 (Stretch route), 2/3 (Core), 0–1 (Support)? Use this to route pupils later in the lesson.</a:t>
@@ -1687,7 +1687,7 @@
             <a:r>
               <a:rPr lang="en-US" dirty="0"/>
               <a:t>Answers — pupils mark their own in a different colour, then hands up for 3/3, 2/3, 1/3.
-1. A   There are no particles to pass the vibration on.. Sound is a mechanical wave: it is carried by particles passing the vibration on. A vacuum has no particles.
+1. B   There are no particles to pass the vibration on.. Sound is a mechanical wave: it is carried by particles passing the vibration on. A vacuum has no particles.
 2. A   Measure the distance across several waves on the screen and divide by the number of waves.. Measuring across many waves on the screen (or a photograph of it) and dividing is accurate and does not disturb the water. Counting waves gives frequency; timing a wave gives speed.
 3. 0.6 m. Loop length = 0.9 ÷ 3 = 0.3 m; each loop is half a wavelength, so λ = 2 × 0.3 = 0.6 m (exact).
 Say the route each score points to: 3/3 Stretch, 2/3 Core, 0–1 Support. Pupils may choose to move up.</a:t>
@@ -9315,7 +9315,7 @@
                 <a:ea typeface="Calibri" pitchFamily="34" charset="-122"/>
                 <a:cs typeface="Calibri" pitchFamily="34" charset="-120"/>
               </a:rPr>
-              <a:t>Sound travels too slowly to cross a vacuum.</a:t>
+              <a:t>There are no particles to pass the vibration on.</a:t>
             </a:r>
             <a:endParaRPr lang="en-US" sz="2400" dirty="0"/>
           </a:p>
@@ -9352,7 +9352,7 @@
                 <a:ea typeface="Calibri" pitchFamily="34" charset="-122"/>
                 <a:cs typeface="Calibri" pitchFamily="34" charset="-120"/>
               </a:rPr>
-              <a:t>A vacuum absorbs all the sound energy.</a:t>
+              <a:t>Sound travels too slowly to cross a vacuum.</a:t>
             </a:r>
             <a:endParaRPr lang="en-US" sz="2400" dirty="0"/>
           </a:p>
@@ -9389,7 +9389,7 @@
                 <a:ea typeface="Calibri" pitchFamily="34" charset="-122"/>
                 <a:cs typeface="Calibri" pitchFamily="34" charset="-120"/>
               </a:rPr>
-              <a:t>Sound is an electromagnetic wave and needs air.</a:t>
+              <a:t>A vacuum absorbs all the sound energy.</a:t>
             </a:r>
             <a:endParaRPr lang="en-US" sz="2400" dirty="0"/>
           </a:p>
@@ -9426,7 +9426,7 @@
                 <a:ea typeface="Calibri" pitchFamily="34" charset="-122"/>
                 <a:cs typeface="Calibri" pitchFamily="34" charset="-120"/>
               </a:rPr>
-              <a:t>There are no particles to pass the vibration on.</a:t>
+              <a:t>Sound is an electromagnetic wave and needs air.</a:t>
             </a:r>
             <a:endParaRPr lang="en-US" sz="2400" dirty="0"/>
           </a:p>
@@ -10749,7 +10749,7 @@
                 <a:ea typeface="Cambria" pitchFamily="34" charset="-122"/>
                 <a:cs typeface="Cambria" pitchFamily="34" charset="-120"/>
               </a:rPr>
-              <a:t>D   There are no particles to pass the vibration on.</a:t>
+              <a:t>A   There are no particles to pass the vibration on.</a:t>
             </a:r>
             <a:endParaRPr lang="en-US" sz="1800" dirty="0"/>
           </a:p>
@@ -11238,7 +11238,7 @@
               <a:buNone/>
             </a:pPr>
             <a:r>
-              <a:rPr lang="en-US" sz="2200" b="1" dirty="0">
+              <a:rPr lang="en-US" sz="2000" b="1" dirty="0">
                 <a:solidFill>
                   <a:srgbClr val="1E2229"/>
                 </a:solidFill>
@@ -11248,17 +11248,17 @@
               </a:rPr>
               <a:t>Why can sound not travel through a vacuum?</a:t>
             </a:r>
-            <a:endParaRPr lang="en-US" sz="2200" dirty="0"/>
+            <a:endParaRPr lang="en-US" sz="2000" dirty="0"/>
           </a:p>
           <a:p>
             <a:pPr algn="l" indent="0" marL="0">
               <a:spcAft>
-                <a:spcPts val="200"/>
+                <a:spcPts val="600"/>
               </a:spcAft>
               <a:buNone/>
             </a:pPr>
             <a:r>
-              <a:rPr lang="en-US" sz="2200" b="1" dirty="0">
+              <a:rPr lang="en-US" sz="2000" b="1" dirty="0">
                 <a:solidFill>
                   <a:srgbClr val="B8862B"/>
                 </a:solidFill>
@@ -11270,12 +11270,12 @@
             </a:r>
             <a:pPr algn="l" indent="0" marL="0">
               <a:spcAft>
-                <a:spcPts val="200"/>
+                <a:spcPts val="600"/>
               </a:spcAft>
               <a:buNone/>
             </a:pPr>
             <a:r>
-              <a:rPr lang="en-US" sz="2200" dirty="0">
+              <a:rPr lang="en-US" sz="2000" dirty="0">
                 <a:solidFill>
                   <a:srgbClr val="1E2229"/>
                 </a:solidFill>
@@ -11283,19 +11283,56 @@
                 <a:ea typeface="Calibri" pitchFamily="34" charset="-122"/>
                 <a:cs typeface="Calibri" pitchFamily="34" charset="-120"/>
               </a:rPr>
+              <a:t>Sound is an electromagnetic wave and needs air.</a:t>
+            </a:r>
+            <a:endParaRPr lang="en-US" sz="2000" dirty="0"/>
+          </a:p>
+          <a:p>
+            <a:pPr algn="l" indent="0" marL="0">
+              <a:spcAft>
+                <a:spcPts val="600"/>
+              </a:spcAft>
+              <a:buNone/>
+            </a:pPr>
+            <a:r>
+              <a:rPr lang="en-US" sz="2000" b="1" dirty="0">
+                <a:solidFill>
+                  <a:srgbClr val="B8862B"/>
+                </a:solidFill>
+                <a:latin typeface="Calibri" pitchFamily="34" charset="0"/>
+                <a:ea typeface="Calibri" pitchFamily="34" charset="-122"/>
+                <a:cs typeface="Calibri" pitchFamily="34" charset="-120"/>
+              </a:rPr>
+              <a:t>B   </a:t>
+            </a:r>
+            <a:pPr algn="l" indent="0" marL="0">
+              <a:spcAft>
+                <a:spcPts val="600"/>
+              </a:spcAft>
+              <a:buNone/>
+            </a:pPr>
+            <a:r>
+              <a:rPr lang="en-US" sz="2000" dirty="0">
+                <a:solidFill>
+                  <a:srgbClr val="1E2229"/>
+                </a:solidFill>
+                <a:latin typeface="Calibri" pitchFamily="34" charset="0"/>
+                <a:ea typeface="Calibri" pitchFamily="34" charset="-122"/>
+                <a:cs typeface="Calibri" pitchFamily="34" charset="-120"/>
+              </a:rPr>
               <a:t>There are no particles to pass the vibration on.</a:t>
             </a:r>
-            <a:endParaRPr lang="en-US" sz="2200" dirty="0"/>
+            <a:endParaRPr lang="en-US" sz="2000" dirty="0"/>
           </a:p>
           <a:p>
             <a:pPr algn="l" indent="0" marL="0">
               <a:spcAft>
-                <a:spcPts val="200"/>
+                <a:spcPts val="600"/>
               </a:spcAft>
               <a:buNone/>
             </a:pPr>
             <a:r>
-              <a:rPr lang="en-US" sz="2200" b="1" dirty="0">
+              <a:rPr lang="en-US" sz="2000" b="1" dirty="0">
                 <a:solidFill>
                   <a:srgbClr val="B8862B"/>
                 </a:solidFill>
@@ -11303,16 +11340,16 @@
                 <a:ea typeface="Calibri" pitchFamily="34" charset="-122"/>
                 <a:cs typeface="Calibri" pitchFamily="34" charset="-120"/>
               </a:rPr>
-              <a:t>B   </a:t>
+              <a:t>C   </a:t>
             </a:r>
             <a:pPr algn="l" indent="0" marL="0">
               <a:spcAft>
-                <a:spcPts val="200"/>
+                <a:spcPts val="600"/>
               </a:spcAft>
               <a:buNone/>
             </a:pPr>
             <a:r>
-              <a:rPr lang="en-US" sz="2200" dirty="0">
+              <a:rPr lang="en-US" sz="2000" dirty="0">
                 <a:solidFill>
                   <a:srgbClr val="1E2229"/>
                 </a:solidFill>
@@ -11322,17 +11359,17 @@
               </a:rPr>
               <a:t>Sound travels too slowly to cross a vacuum.</a:t>
             </a:r>
-            <a:endParaRPr lang="en-US" sz="2200" dirty="0"/>
+            <a:endParaRPr lang="en-US" sz="2000" dirty="0"/>
           </a:p>
           <a:p>
             <a:pPr algn="l" indent="0" marL="0">
               <a:spcAft>
-                <a:spcPts val="200"/>
+                <a:spcPts val="600"/>
               </a:spcAft>
               <a:buNone/>
             </a:pPr>
             <a:r>
-              <a:rPr lang="en-US" sz="2200" b="1" dirty="0">
+              <a:rPr lang="en-US" sz="2000" b="1" dirty="0">
                 <a:solidFill>
                   <a:srgbClr val="B8862B"/>
                 </a:solidFill>
@@ -11340,16 +11377,16 @@
                 <a:ea typeface="Calibri" pitchFamily="34" charset="-122"/>
                 <a:cs typeface="Calibri" pitchFamily="34" charset="-120"/>
               </a:rPr>
-              <a:t>C   </a:t>
+              <a:t>D   </a:t>
             </a:r>
             <a:pPr algn="l" indent="0" marL="0">
               <a:spcAft>
-                <a:spcPts val="200"/>
+                <a:spcPts val="600"/>
               </a:spcAft>
               <a:buNone/>
             </a:pPr>
             <a:r>
-              <a:rPr lang="en-US" sz="2200" dirty="0">
+              <a:rPr lang="en-US" sz="2000" dirty="0">
                 <a:solidFill>
                   <a:srgbClr val="1E2229"/>
                 </a:solidFill>
@@ -11359,44 +11396,7 @@
               </a:rPr>
               <a:t>A vacuum absorbs all the sound energy.</a:t>
             </a:r>
-            <a:endParaRPr lang="en-US" sz="2200" dirty="0"/>
-          </a:p>
-          <a:p>
-            <a:pPr algn="l" indent="0" marL="0">
-              <a:spcAft>
-                <a:spcPts val="200"/>
-              </a:spcAft>
-              <a:buNone/>
-            </a:pPr>
-            <a:r>
-              <a:rPr lang="en-US" sz="2200" b="1" dirty="0">
-                <a:solidFill>
-                  <a:srgbClr val="B8862B"/>
-                </a:solidFill>
-                <a:latin typeface="Calibri" pitchFamily="34" charset="0"/>
-                <a:ea typeface="Calibri" pitchFamily="34" charset="-122"/>
-                <a:cs typeface="Calibri" pitchFamily="34" charset="-120"/>
-              </a:rPr>
-              <a:t>D   </a:t>
-            </a:r>
-            <a:pPr algn="l" indent="0" marL="0">
-              <a:spcAft>
-                <a:spcPts val="200"/>
-              </a:spcAft>
-              <a:buNone/>
-            </a:pPr>
-            <a:r>
-              <a:rPr lang="en-US" sz="2200" dirty="0">
-                <a:solidFill>
-                  <a:srgbClr val="1E2229"/>
-                </a:solidFill>
-                <a:latin typeface="Calibri" pitchFamily="34" charset="0"/>
-                <a:ea typeface="Calibri" pitchFamily="34" charset="-122"/>
-                <a:cs typeface="Calibri" pitchFamily="34" charset="-120"/>
-              </a:rPr>
-              <a:t>Sound is an electromagnetic wave and needs air.</a:t>
-            </a:r>
-            <a:endParaRPr lang="en-US" sz="2200" dirty="0"/>
+            <a:endParaRPr lang="en-US" sz="2000" dirty="0"/>
           </a:p>
         </p:txBody>
       </p:sp>
@@ -11635,7 +11635,7 @@
                 <a:ea typeface="Calibri" pitchFamily="34" charset="-122"/>
                 <a:cs typeface="Calibri" pitchFamily="34" charset="-120"/>
               </a:rPr>
-              <a:t>Measure one wave with a ruler held in the water.</a:t>
+              <a:t>Count the waves passing a point in 10 seconds.</a:t>
             </a:r>
             <a:endParaRPr lang="en-US" sz="1800" dirty="0"/>
           </a:p>
@@ -11672,7 +11672,7 @@
                 <a:ea typeface="Calibri" pitchFamily="34" charset="-122"/>
                 <a:cs typeface="Calibri" pitchFamily="34" charset="-120"/>
               </a:rPr>
-              <a:t>Count the waves passing a point in 10 seconds.</a:t>
+              <a:t>Time one wave crossing the tank.</a:t>
             </a:r>
             <a:endParaRPr lang="en-US" sz="1800" dirty="0"/>
           </a:p>
@@ -11709,7 +11709,7 @@
                 <a:ea typeface="Calibri" pitchFamily="34" charset="-122"/>
                 <a:cs typeface="Calibri" pitchFamily="34" charset="-120"/>
               </a:rPr>
-              <a:t>Time one wave crossing the tank.</a:t>
+              <a:t>Measure one wave with a ruler held in the water.</a:t>
             </a:r>
             <a:endParaRPr lang="en-US" sz="1800" dirty="0"/>
           </a:p>
@@ -12518,7 +12518,7 @@
                 <a:ea typeface="Calibri" pitchFamily="34" charset="-122"/>
                 <a:cs typeface="Calibri" pitchFamily="34" charset="-120"/>
               </a:rPr>
-              <a:t>A   There are no particles to pass the vibration on.</a:t>
+              <a:t>B   There are no particles to pass the vibration on.</a:t>
             </a:r>
             <a:endParaRPr lang="en-US" sz="2200" dirty="0"/>
           </a:p>

--- a/decks/combined-waves/combined-waves_ch5_measuring-waves.pptx
+++ b/decks/combined-waves/combined-waves_ch5_measuring-waves.pptx
@@ -124,30 +124,30 @@
   <p:extLst>
     <p:ext uri="{521415D9-36F7-43E2-AB2F-B90AF26B5E84}">
       <p14:sectionLst xmlns:p14="http://schemas.microsoft.com/office/powerpoint/2010/main">
-        <p14:section name="Opening" id="{5b3877c2-96e8-e827-8d34-2adc97faac5a}">
+        <p14:section name="Opening" id="{5709403d-9597-5047-713f-0c5e9d8525f6}">
           <p14:sldIdLst>
             <p14:sldId id="256"/>
           </p14:sldIdLst>
         </p14:section>
-        <p14:section name="Gate" id="{eb585302-86c8-747b-cfa9-02e92eff235f}">
+        <p14:section name="Gate" id="{6b736a38-e257-17cc-7e02-8c0ba01fc318}">
           <p14:sldIdLst>
             <p14:sldId id="257"/>
             <p14:sldId id="258"/>
             <p14:sldId id="259"/>
           </p14:sldIdLst>
         </p14:section>
-        <p14:section name="Pre-teach" id="{be4d2da1-672e-a423-5f5c-b8da80c60f54}">
+        <p14:section name="Pre-teach" id="{17408c11-8962-6feb-ed51-0989162463a7}">
           <p14:sldIdLst>
             <p14:sldId id="260"/>
           </p14:sldIdLst>
         </p14:section>
-        <p14:section name="Read-along" id="{58ea3c47-d021-7c09-e526-33e1483f63f5}">
+        <p14:section name="Read-along" id="{db5953ca-f1b1-8faf-34f7-9b78c2615680}">
           <p14:sldIdLst>
             <p14:sldId id="261"/>
             <p14:sldId id="262"/>
           </p14:sldIdLst>
         </p14:section>
-        <p14:section name="Teach" id="{81fce38f-a1ad-30ca-fa0f-4255a262f0b7}">
+        <p14:section name="Teach" id="{b89561c0-1423-82b5-948e-3232c00050b8}">
           <p14:sldIdLst>
             <p14:sldId id="263"/>
             <p14:sldId id="264"/>
@@ -156,18 +156,18 @@
             <p14:sldId id="267"/>
           </p14:sldIdLst>
         </p14:section>
-        <p14:section name="Routes" id="{9a157aed-6aac-3b7e-877d-6accc51f47fd}">
+        <p14:section name="Routes" id="{efbb7d42-f6b4-6840-6f1c-04e4a9ee15dd}">
           <p14:sldIdLst>
             <p14:sldId id="268"/>
             <p14:sldId id="269"/>
           </p14:sldIdLst>
         </p14:section>
-        <p14:section name="Close" id="{8b56a6b7-0d87-8390-a195-fd3b4580db77}">
+        <p14:section name="Close" id="{063088da-cf34-77ab-f751-683e0d276e36}">
           <p14:sldIdLst>
             <p14:sldId id="270"/>
           </p14:sldIdLst>
         </p14:section>
-        <p14:section name="Answers" id="{4b8aabb7-cd40-93e7-dde9-fb1661350959}">
+        <p14:section name="Answers" id="{02db56cd-fd0a-e554-9d92-f64063b9fb57}">
           <p14:sldIdLst>
             <p14:sldId id="271"/>
             <p14:sldId id="272"/>
